--- a/docs/Redrob_HireFit_Ranker.pptx
+++ b/docs/Redrob_HireFit_Ranker.pptx
@@ -3139,9 +3139,79 @@
           </a:p>
         </p:txBody>
       </p:sp>
-      <p:sp>
-        <p:nvSpPr>
-          <p:cNvPr id="3" name="TextBox 2"/>
+      <p:pic>
+        <p:nvPicPr>
+          <p:cNvPr id="3" name="Picture 2" descr="cover.png"/>
+          <p:cNvPicPr>
+            <a:picLocks noChangeAspect="1"/>
+          </p:cNvPicPr>
+          <p:nvPr/>
+        </p:nvPicPr>
+        <p:blipFill>
+          <a:blip r:embed="rId2"/>
+          <a:stretch>
+            <a:fillRect/>
+          </a:stretch>
+        </p:blipFill>
+        <p:spPr>
+          <a:xfrm>
+            <a:off x="0" y="0"/>
+            <a:ext cx="12191695" cy="6858000"/>
+          </a:xfrm>
+          <a:prstGeom prst="rect">
+            <a:avLst/>
+          </a:prstGeom>
+        </p:spPr>
+      </p:pic>
+      <p:sp>
+        <p:nvSpPr>
+          <p:cNvPr id="4" name="Rectangle 3"/>
+          <p:cNvSpPr/>
+          <p:nvPr/>
+        </p:nvSpPr>
+        <p:spPr>
+          <a:xfrm>
+            <a:off x="0" y="0"/>
+            <a:ext cx="6949440" cy="6858000"/>
+          </a:xfrm>
+          <a:prstGeom prst="rect">
+            <a:avLst/>
+          </a:prstGeom>
+          <a:solidFill>
+            <a:srgbClr val="0B1220">
+              <a:alpha val="62000"/>
+            </a:srgbClr>
+          </a:solidFill>
+          <a:ln>
+            <a:noFill/>
+          </a:ln>
+          <a:effectLst/>
+        </p:spPr>
+        <p:style>
+          <a:lnRef idx="1">
+            <a:schemeClr val="accent1"/>
+          </a:lnRef>
+          <a:fillRef idx="3">
+            <a:schemeClr val="accent1"/>
+          </a:fillRef>
+          <a:effectRef idx="2">
+            <a:schemeClr val="accent1"/>
+          </a:effectRef>
+          <a:fontRef idx="minor">
+            <a:schemeClr val="lt1"/>
+          </a:fontRef>
+        </p:style>
+        <p:txBody>
+          <a:bodyPr rtlCol="0" anchor="ctr"/>
+          <a:lstStyle/>
+          <a:p>
+            <a:pPr algn="ctr"/>
+          </a:p>
+        </p:txBody>
+      </p:sp>
+      <p:sp>
+        <p:nvSpPr>
+          <p:cNvPr id="5" name="TextBox 4"/>
           <p:cNvSpPr txBox="1"/>
           <p:nvPr/>
         </p:nvSpPr>
@@ -3176,7 +3246,7 @@
       </p:sp>
       <p:sp>
         <p:nvSpPr>
-          <p:cNvPr id="4" name="TextBox 3"/>
+          <p:cNvPr id="6" name="TextBox 5"/>
           <p:cNvSpPr txBox="1"/>
           <p:nvPr/>
         </p:nvSpPr>
@@ -3211,7 +3281,7 @@
       </p:sp>
       <p:sp>
         <p:nvSpPr>
-          <p:cNvPr id="5" name="TextBox 4"/>
+          <p:cNvPr id="7" name="TextBox 6"/>
           <p:cNvSpPr txBox="1"/>
           <p:nvPr/>
         </p:nvSpPr>
@@ -3246,7 +3316,7 @@
       </p:sp>
       <p:sp>
         <p:nvSpPr>
-          <p:cNvPr id="6" name="TextBox 5"/>
+          <p:cNvPr id="8" name="TextBox 7"/>
           <p:cNvSpPr txBox="1"/>
           <p:nvPr/>
         </p:nvSpPr>
@@ -3293,7 +3363,7 @@
       </p:sp>
       <p:sp>
         <p:nvSpPr>
-          <p:cNvPr id="7" name="TextBox 6"/>
+          <p:cNvPr id="9" name="TextBox 8"/>
           <p:cNvSpPr txBox="1"/>
           <p:nvPr/>
         </p:nvSpPr>

--- a/docs/Redrob_HireFit_Ranker.pptx
+++ b/docs/Redrob_HireFit_Ranker.pptx
@@ -13,6 +13,7 @@
     <p:sldId id="261" r:id="rId12"/>
     <p:sldId id="262" r:id="rId13"/>
     <p:sldId id="263" r:id="rId14"/>
+    <p:sldId id="264" r:id="rId15"/>
   </p:sldIdLst>
   <p:sldSz cx="12191695" cy="6858000" type="screen4x3"/>
   <p:notesSz cx="6858000" cy="9144000"/>
@@ -6569,6 +6570,245 @@
 </file>
 
 <file path=ppt/slides/slide8.xml><?xml version="1.0" encoding="utf-8"?>
+<p:sld xmlns:a="http://schemas.openxmlformats.org/drawingml/2006/main" xmlns:p="http://schemas.openxmlformats.org/presentationml/2006/main" xmlns:r="http://schemas.openxmlformats.org/officeDocument/2006/relationships">
+  <p:cSld>
+    <p:spTree>
+      <p:nvGrpSpPr>
+        <p:cNvPr id="1" name=""/>
+        <p:cNvGrpSpPr/>
+        <p:nvPr/>
+      </p:nvGrpSpPr>
+      <p:grpSpPr/>
+      <p:sp>
+        <p:nvSpPr>
+          <p:cNvPr id="2" name="Rectangle 1"/>
+          <p:cNvSpPr/>
+          <p:nvPr/>
+        </p:nvSpPr>
+        <p:spPr>
+          <a:xfrm>
+            <a:off x="0" y="0"/>
+            <a:ext cx="12191695" cy="6858000"/>
+          </a:xfrm>
+          <a:prstGeom prst="rect">
+            <a:avLst/>
+          </a:prstGeom>
+          <a:solidFill>
+            <a:srgbClr val="FFFFFF"/>
+          </a:solidFill>
+          <a:ln>
+            <a:noFill/>
+          </a:ln>
+          <a:effectLst/>
+        </p:spPr>
+        <p:style>
+          <a:lnRef idx="1">
+            <a:schemeClr val="accent1"/>
+          </a:lnRef>
+          <a:fillRef idx="3">
+            <a:schemeClr val="accent1"/>
+          </a:fillRef>
+          <a:effectRef idx="2">
+            <a:schemeClr val="accent1"/>
+          </a:effectRef>
+          <a:fontRef idx="minor">
+            <a:schemeClr val="lt1"/>
+          </a:fontRef>
+        </p:style>
+        <p:txBody>
+          <a:bodyPr rtlCol="0" anchor="ctr"/>
+          <a:lstStyle/>
+          <a:p>
+            <a:pPr algn="ctr"/>
+          </a:p>
+        </p:txBody>
+      </p:sp>
+      <p:sp>
+        <p:nvSpPr>
+          <p:cNvPr id="3" name="TextBox 2"/>
+          <p:cNvSpPr txBox="1"/>
+          <p:nvPr/>
+        </p:nvSpPr>
+        <p:spPr>
+          <a:xfrm>
+            <a:off x="640080" y="457200"/>
+            <a:ext cx="10972800" cy="365760"/>
+          </a:xfrm>
+          <a:prstGeom prst="rect">
+            <a:avLst/>
+          </a:prstGeom>
+          <a:noFill/>
+        </p:spPr>
+        <p:txBody>
+          <a:bodyPr wrap="square">
+            <a:spAutoFit/>
+          </a:bodyPr>
+          <a:lstStyle/>
+          <a:p>
+            <a:pPr algn="l"/>
+            <a:r>
+              <a:rPr sz="1200" b="1">
+                <a:solidFill>
+                  <a:srgbClr val="F59E0B"/>
+                </a:solidFill>
+                <a:latin typeface="Segoe UI"/>
+              </a:rPr>
+              <a:t>ENTERPRISE UPGRADE</a:t>
+            </a:r>
+          </a:p>
+        </p:txBody>
+      </p:sp>
+      <p:sp>
+        <p:nvSpPr>
+          <p:cNvPr id="4" name="TextBox 3"/>
+          <p:cNvSpPr txBox="1"/>
+          <p:nvPr/>
+        </p:nvSpPr>
+        <p:spPr>
+          <a:xfrm>
+            <a:off x="640080" y="868680"/>
+            <a:ext cx="10972800" cy="822960"/>
+          </a:xfrm>
+          <a:prstGeom prst="rect">
+            <a:avLst/>
+          </a:prstGeom>
+          <a:noFill/>
+        </p:spPr>
+        <p:txBody>
+          <a:bodyPr wrap="square">
+            <a:spAutoFit/>
+          </a:bodyPr>
+          <a:lstStyle/>
+          <a:p>
+            <a:pPr algn="l"/>
+            <a:r>
+              <a:rPr sz="3000" b="1">
+                <a:solidFill>
+                  <a:srgbClr val="0B1220"/>
+                </a:solidFill>
+                <a:latin typeface="Segoe UI"/>
+              </a:rPr>
+              <a:t>Lab Architecture vs Baseline Prototype</a:t>
+            </a:r>
+          </a:p>
+        </p:txBody>
+      </p:sp>
+      <p:sp>
+        <p:nvSpPr>
+          <p:cNvPr id="5" name="TextBox 4"/>
+          <p:cNvSpPr txBox="1"/>
+          <p:nvPr/>
+        </p:nvSpPr>
+        <p:spPr>
+          <a:xfrm>
+            <a:off x="640080" y="1737360"/>
+            <a:ext cx="10881360" cy="4114800"/>
+          </a:xfrm>
+          <a:prstGeom prst="rect">
+            <a:avLst/>
+          </a:prstGeom>
+          <a:noFill/>
+        </p:spPr>
+        <p:txBody>
+          <a:bodyPr wrap="square">
+            <a:spAutoFit/>
+          </a:bodyPr>
+          <a:lstStyle/>
+          <a:p>
+            <a:pPr algn="l"/>
+            <a:r>
+              <a:rPr sz="1600" b="0">
+                <a:solidFill>
+                  <a:srgbClr val="334155"/>
+                </a:solidFill>
+                <a:latin typeface="Segoe UI"/>
+              </a:rPr>
+              <a:t>•  TEST COVERAGE (114 ➔ 167): Expanded coverage by +46%, including 12 rigorous counterfactual tests bounding location, gender, and name proxies mathematically.</a:t>
+            </a:r>
+          </a:p>
+          <a:p>
+            <a:pPr algn="l"/>
+            <a:r>
+              <a:rPr sz="1600" b="0">
+                <a:solidFill>
+                  <a:srgbClr val="334155"/>
+                </a:solidFill>
+                <a:latin typeface="Segoe UI"/>
+              </a:rPr>
+              <a:t/>
+            </a:r>
+          </a:p>
+          <a:p>
+            <a:pPr algn="l"/>
+            <a:r>
+              <a:rPr sz="1600" b="0">
+                <a:solidFill>
+                  <a:srgbClr val="334155"/>
+                </a:solidFill>
+                <a:latin typeface="Segoe UI"/>
+              </a:rPr>
+              <a:t>•  BACKEND STORAGE (Dicts ➔ SQLite): Migrated from volatile in-memory storage to a persistent SQLite WAL database, ensuring batch operations survive server restarts.</a:t>
+            </a:r>
+          </a:p>
+          <a:p>
+            <a:pPr algn="l"/>
+            <a:r>
+              <a:rPr sz="1600" b="0">
+                <a:solidFill>
+                  <a:srgbClr val="334155"/>
+                </a:solidFill>
+                <a:latin typeface="Segoe UI"/>
+              </a:rPr>
+              <a:t/>
+            </a:r>
+          </a:p>
+          <a:p>
+            <a:pPr algn="l"/>
+            <a:r>
+              <a:rPr sz="1600" b="0">
+                <a:solidFill>
+                  <a:srgbClr val="334155"/>
+                </a:solidFill>
+                <a:latin typeface="Segoe UI"/>
+              </a:rPr>
+              <a:t>•  API SECURITY (Open ➔ X-Demo-Token): Guarded all write-endpoints with token authentication to prevent unauthorized abuse in production.</a:t>
+            </a:r>
+          </a:p>
+          <a:p>
+            <a:pPr algn="l"/>
+            <a:r>
+              <a:rPr sz="1600" b="0">
+                <a:solidFill>
+                  <a:srgbClr val="334155"/>
+                </a:solidFill>
+                <a:latin typeface="Segoe UI"/>
+              </a:rPr>
+              <a:t/>
+            </a:r>
+          </a:p>
+          <a:p>
+            <a:pPr algn="l"/>
+            <a:r>
+              <a:rPr sz="1600" b="0">
+                <a:solidFill>
+                  <a:srgbClr val="334155"/>
+                </a:solidFill>
+                <a:latin typeface="Segoe UI"/>
+              </a:rPr>
+              <a:t>•  SYSTEM RATING (89/100 ➔ 91/100): Successfully closed the 100-score gap while maintaining sub-80s execution time and zero honeypots.</a:t>
+            </a:r>
+          </a:p>
+        </p:txBody>
+      </p:sp>
+    </p:spTree>
+  </p:cSld>
+  <p:clrMapOvr>
+    <a:masterClrMapping/>
+  </p:clrMapOvr>
+</p:sld>
+</file>
+
+<file path=ppt/slides/slide9.xml><?xml version="1.0" encoding="utf-8"?>
 <p:sld xmlns:a="http://schemas.openxmlformats.org/drawingml/2006/main" xmlns:p="http://schemas.openxmlformats.org/presentationml/2006/main" xmlns:r="http://schemas.openxmlformats.org/officeDocument/2006/relationships">
   <p:cSld>
     <p:spTree>

--- a/docs/Redrob_HireFit_Ranker.pptx
+++ b/docs/Redrob_HireFit_Ranker.pptx
@@ -6723,7 +6723,7 @@
                 </a:solidFill>
                 <a:latin typeface="Segoe UI"/>
               </a:rPr>
-              <a:t>•  TEST COVERAGE (114 ➔ 167): Expanded coverage by +46%, including 12 rigorous counterfactual tests bounding location, gender, and name proxies mathematically.</a:t>
+              <a:t>•  TEST COVERAGE (115 ➔ 163): Expanded coverage by +42%, including 13 rigorous counterfactual tests bounding location, gender, and name proxies mathematically.</a:t>
             </a:r>
           </a:p>
           <a:p>
@@ -6795,7 +6795,7 @@
                 </a:solidFill>
                 <a:latin typeface="Segoe UI"/>
               </a:rPr>
-              <a:t>•  SYSTEM RATING (89/100 ➔ 91/100): Successfully closed the 100-score gap while maintaining sub-80s execution time and zero honeypots.</a:t>
+              <a:t>•  SYSTEM RATING (89/100 ➔ 91/100 self-assessed; independent forensic audit ~88/100): Closed the 100-score gap with the official ranking now byte-reproducible in the pinned Docker image; ~80s on a cloud 2-vCPU runner (~130-155s in local Docker); zero honeypots in the top 100.</a:t>
             </a:r>
           </a:p>
         </p:txBody>

--- a/docs/Redrob_HireFit_Ranker.pptx
+++ b/docs/Redrob_HireFit_Ranker.pptx
@@ -6717,19 +6717,19 @@
           <a:p>
             <a:pPr algn="l"/>
             <a:r>
-              <a:rPr sz="1600" b="0">
+              <a:rPr sz="1500" b="0">
                 <a:solidFill>
                   <a:srgbClr val="334155"/>
                 </a:solidFill>
                 <a:latin typeface="Segoe UI"/>
               </a:rPr>
-              <a:t>•  TEST COVERAGE (115 ➔ 163): Expanded coverage by +42%, including 13 rigorous counterfactual tests bounding location, gender, and name proxies mathematically.</a:t>
-            </a:r>
-          </a:p>
-          <a:p>
-            <a:pPr algn="l"/>
-            <a:r>
-              <a:rPr sz="1600" b="0">
+              <a:t>•  INTEGRITY (calibration removed): candidate-ID calibration deleted from the official ranking path — NO candidate-ID tuning, CI-enforced; golden submission.csv byte-reproducible across CPU counts.</a:t>
+            </a:r>
+          </a:p>
+          <a:p>
+            <a:pPr algn="l"/>
+            <a:r>
+              <a:rPr sz="1500" b="0">
                 <a:solidFill>
                   <a:srgbClr val="334155"/>
                 </a:solidFill>
@@ -6741,19 +6741,43 @@
           <a:p>
             <a:pPr algn="l"/>
             <a:r>
-              <a:rPr sz="1600" b="0">
+              <a:rPr sz="1500" b="0">
                 <a:solidFill>
                   <a:srgbClr val="334155"/>
                 </a:solidFill>
                 <a:latin typeface="Segoe UI"/>
               </a:rPr>
+              <a:t>•  TEST COVERAGE (115 ➔ 163): +42% coverage, including 13 counterfactual fairness tests bounding location, gender, and name proxies.</a:t>
+            </a:r>
+          </a:p>
+          <a:p>
+            <a:pPr algn="l"/>
+            <a:r>
+              <a:rPr sz="1500" b="0">
+                <a:solidFill>
+                  <a:srgbClr val="334155"/>
+                </a:solidFill>
+                <a:latin typeface="Segoe UI"/>
+              </a:rPr>
+              <a:t/>
+            </a:r>
+          </a:p>
+          <a:p>
+            <a:pPr algn="l"/>
+            <a:r>
+              <a:rPr sz="1500" b="0">
+                <a:solidFill>
+                  <a:srgbClr val="334155"/>
+                </a:solidFill>
+                <a:latin typeface="Segoe UI"/>
+              </a:rPr>
               <a:t>•  BACKEND STORAGE (Dicts ➔ SQLite): Migrated from volatile in-memory storage to a persistent SQLite WAL database, ensuring batch operations survive server restarts.</a:t>
             </a:r>
           </a:p>
           <a:p>
             <a:pPr algn="l"/>
             <a:r>
-              <a:rPr sz="1600" b="0">
+              <a:rPr sz="1500" b="0">
                 <a:solidFill>
                   <a:srgbClr val="334155"/>
                 </a:solidFill>
@@ -6765,7 +6789,7 @@
           <a:p>
             <a:pPr algn="l"/>
             <a:r>
-              <a:rPr sz="1600" b="0">
+              <a:rPr sz="1500" b="0">
                 <a:solidFill>
                   <a:srgbClr val="334155"/>
                 </a:solidFill>
@@ -6777,7 +6801,7 @@
           <a:p>
             <a:pPr algn="l"/>
             <a:r>
-              <a:rPr sz="1600" b="0">
+              <a:rPr sz="1500" b="0">
                 <a:solidFill>
                   <a:srgbClr val="334155"/>
                 </a:solidFill>
@@ -6789,13 +6813,13 @@
           <a:p>
             <a:pPr algn="l"/>
             <a:r>
-              <a:rPr sz="1600" b="0">
+              <a:rPr sz="1500" b="0">
                 <a:solidFill>
                   <a:srgbClr val="334155"/>
                 </a:solidFill>
                 <a:latin typeface="Segoe UI"/>
               </a:rPr>
-              <a:t>•  SYSTEM RATING (89/100 ➔ 91/100 self-assessed; independent forensic audit ~88/100): Closed the 100-score gap with the official ranking now byte-reproducible in the pinned Docker image; ~80s on a cloud 2-vCPU runner (~130-155s in local Docker); zero honeypots in the top 100.</a:t>
+              <a:t>•  SYSTEM RATING (89/100 ➔ 91/100 self-assessed; independent forensic audit ~88/100): ~80s on a cloud 2-vCPU runner (~130-155s in local Docker); zero honeypots in the top 100; generalization eval 0.7702 vs 0.6602 keyword across 5 role families.</a:t>
             </a:r>
           </a:p>
         </p:txBody>
